--- a/Tatvam_Jalam_User_Guide.pptx
+++ b/Tatvam_Jalam_User_Guide.pptx
@@ -5940,7 +5940,7 @@
                 </a:solidFill>
                 <a:latin typeface="Calibri"/>
               </a:rPr>
-              <a:t>🔗  kvinayakpai.github.io/Bhagavadgita/viewer-bundled.html</a:t>
+              <a:t>🔗  kvinayakpai.github.io/Bhagavadgita/viewer.html</a:t>
             </a:r>
           </a:p>
         </p:txBody>
@@ -6356,7 +6356,7 @@
                 </a:solidFill>
                 <a:latin typeface="Calibri"/>
               </a:rPr>
-              <a:t>kvinayakpai.github.io/Bhagavadgita/viewer-bundled.html</a:t>
+              <a:t>kvinayakpai.github.io/Bhagavadgita/viewer.html</a:t>
             </a:r>
           </a:p>
         </p:txBody>
@@ -6758,7 +6758,7 @@
                 </a:solidFill>
                 <a:latin typeface="Calibri"/>
               </a:rPr>
-              <a:t>Explore 117 philosophical concepts as an interactive visual map.</a:t>
+              <a:t>Explore 47 philosophical concepts as an interactive visual map — filterable by chapter or verse.</a:t>
             </a:r>
           </a:p>
         </p:txBody>
@@ -7840,7 +7840,7 @@
                 </a:solidFill>
                 <a:latin typeface="Calibri"/>
               </a:rPr>
-              <a:t>A list of all 47 concepts grouped by their rank in Madhva's hierarchy (from Bhagavān at the top to tāmoyogyas at the bottom).</a:t>
+              <a:t>A list of all 47 concepts grouped by their rank in Madhva's hierarchy (from Parabrahma at the top to Phala at the bottom).</a:t>
             </a:r>
           </a:p>
         </p:txBody>
@@ -9121,7 +9121,7 @@
                 </a:solidFill>
                 <a:latin typeface="Calibri"/>
               </a:rPr>
-              <a:t>An interactive visual graph showing all 47 concepts and how they connect to each other as a web.</a:t>
+              <a:t>An interactive visual graph showing all 47 concepts and how they connect. Filter it to one chapter or verse with the dropdowns above the graph.</a:t>
             </a:r>
           </a:p>
         </p:txBody>
@@ -10523,7 +10523,7 @@
                 </a:solidFill>
                 <a:latin typeface="Calibri"/>
               </a:rPr>
-              <a:t>Interactive knowledge graph</a:t>
+              <a:t>Interactive knowledge graph, filterable by chapter</a:t>
             </a:r>
           </a:p>
         </p:txBody>
@@ -10926,7 +10926,7 @@
                 </a:solidFill>
                 <a:latin typeface="Calibri"/>
               </a:rPr>
-              <a:t>₹480 starter credit lasts months. (1 USD = ₹95.80, May 2026)</a:t>
+              <a:t>₹480 starter credit lasts months. (1 USD ≈ ₹94.5, June 2026)</a:t>
             </a:r>
           </a:p>
         </p:txBody>
@@ -11328,7 +11328,7 @@
                 </a:solidFill>
                 <a:latin typeface="Calibri"/>
               </a:rPr>
-              <a:t>⚠  Chat needs a free Anthropic API key. Takes 5 minutes. You pay only for what you use — about ₹2–5 per question (1 USD = ₹95.80, May 2026).</a:t>
+              <a:t>⚠  Chat needs a free Anthropic API key. Takes 5 minutes. You pay only for what you use — about ₹2–5 per question (1 USD ≈ ₹94.5, June 2026).</a:t>
             </a:r>
           </a:p>
         </p:txBody>
@@ -13383,7 +13383,7 @@
                 </a:solidFill>
                 <a:latin typeface="Calibri"/>
               </a:rPr>
-              <a:t>Go to Billing → Add Credit. ₹480 (≈ 1 USD = ₹95.80) is enough for months of use.</a:t>
+              <a:t>Go to Billing → Add Credit. ₹480 (≈ 1 USD = ₹94.5) is enough for months of use.</a:t>
             </a:r>
           </a:p>
         </p:txBody>
@@ -14875,7 +14875,7 @@
                 </a:solidFill>
                 <a:latin typeface="Calibri"/>
               </a:rPr>
-              <a:t>💡  Cost: ~₹2–5 per question. ₹480 starter credit lasts months. (1 USD = ₹95.80 as of May 2026)</a:t>
+              <a:t>💡  Cost: ~₹2–5 per question. ₹480 starter credit lasts months. (1 USD ≈ ₹94.5, June 2026)</a:t>
             </a:r>
           </a:p>
         </p:txBody>
